--- a/微生物学(Microbiology)/pre/肠道菌群与减肥.pptx
+++ b/微生物学(Microbiology)/pre/肠道菌群与减肥.pptx
@@ -207,7 +207,7 @@
           <a:p>
             <a:fld id="{A1476ACB-BB8E-F14D-8283-E0B87B2A3512}" type="datetimeFigureOut">
               <a:rPr kumimoji="1" lang="zh-CN" altLang="en-US" smtClean="0"/>
-              <a:t>2025/5/20</a:t>
+              <a:t>2025/5/30</a:t>
             </a:fld>
             <a:endParaRPr kumimoji="1" lang="zh-CN" altLang="en-US"/>
           </a:p>
@@ -1886,7 +1886,7 @@
           <a:p>
             <a:fld id="{850CF2B5-AB47-AD46-A871-80FDD98E01AC}" type="datetime1">
               <a:rPr kumimoji="1" lang="en-US" altLang="zh-CN" smtClean="0"/>
-              <a:t>5/20/25</a:t>
+              <a:t>5/30/25</a:t>
             </a:fld>
             <a:endParaRPr kumimoji="1" lang="zh-CN" altLang="en-US"/>
           </a:p>
@@ -1956,13 +1956,13 @@
   <p:clrMapOvr>
     <a:masterClrMapping/>
   </p:clrMapOvr>
-  <mc:AlternateContent xmlns:mc="http://schemas.openxmlformats.org/markup-compatibility/2006">
-    <mc:Choice xmlns:p159="http://schemas.microsoft.com/office/powerpoint/2015/09/main" Requires="p159">
+  <mc:AlternateContent xmlns:mc="http://schemas.openxmlformats.org/markup-compatibility/2006" xmlns:p159="http://schemas.microsoft.com/office/powerpoint/2015/09/main">
+    <mc:Choice Requires="p159">
       <p:transition>
         <p159:morph option="byObject"/>
       </p:transition>
     </mc:Choice>
-    <mc:Fallback>
+    <mc:Fallback xmlns="">
       <p:transition>
         <p:fade/>
       </p:transition>
@@ -2098,7 +2098,7 @@
           <a:p>
             <a:fld id="{7E8F5E50-BA50-9945-AC2C-1C0FF38AD474}" type="datetime1">
               <a:rPr kumimoji="1" lang="en-US" altLang="zh-CN" smtClean="0"/>
-              <a:t>5/20/25</a:t>
+              <a:t>5/30/25</a:t>
             </a:fld>
             <a:endParaRPr kumimoji="1" lang="zh-CN" altLang="en-US"/>
           </a:p>
@@ -2168,13 +2168,13 @@
   <p:clrMapOvr>
     <a:masterClrMapping/>
   </p:clrMapOvr>
-  <mc:AlternateContent xmlns:mc="http://schemas.openxmlformats.org/markup-compatibility/2006">
-    <mc:Choice xmlns:p159="http://schemas.microsoft.com/office/powerpoint/2015/09/main" Requires="p159">
+  <mc:AlternateContent xmlns:mc="http://schemas.openxmlformats.org/markup-compatibility/2006" xmlns:p159="http://schemas.microsoft.com/office/powerpoint/2015/09/main">
+    <mc:Choice Requires="p159">
       <p:transition>
         <p159:morph option="byObject"/>
       </p:transition>
     </mc:Choice>
-    <mc:Fallback>
+    <mc:Fallback xmlns="">
       <p:transition>
         <p:fade/>
       </p:transition>
@@ -2320,7 +2320,7 @@
           <a:p>
             <a:fld id="{B1626F83-F711-C241-8A7F-2A04C460F23F}" type="datetime1">
               <a:rPr kumimoji="1" lang="en-US" altLang="zh-CN" smtClean="0"/>
-              <a:t>5/20/25</a:t>
+              <a:t>5/30/25</a:t>
             </a:fld>
             <a:endParaRPr kumimoji="1" lang="zh-CN" altLang="en-US"/>
           </a:p>
@@ -2390,13 +2390,13 @@
   <p:clrMapOvr>
     <a:masterClrMapping/>
   </p:clrMapOvr>
-  <mc:AlternateContent xmlns:mc="http://schemas.openxmlformats.org/markup-compatibility/2006">
-    <mc:Choice xmlns:p159="http://schemas.microsoft.com/office/powerpoint/2015/09/main" Requires="p159">
+  <mc:AlternateContent xmlns:mc="http://schemas.openxmlformats.org/markup-compatibility/2006" xmlns:p159="http://schemas.microsoft.com/office/powerpoint/2015/09/main">
+    <mc:Choice Requires="p159">
       <p:transition>
         <p159:morph option="byObject"/>
       </p:transition>
     </mc:Choice>
-    <mc:Fallback>
+    <mc:Fallback xmlns="">
       <p:transition>
         <p:fade/>
       </p:transition>
@@ -2532,7 +2532,7 @@
           <a:p>
             <a:fld id="{A00FE0AF-814D-9F48-A071-F5D75D71C59A}" type="datetime1">
               <a:rPr kumimoji="1" lang="en-US" altLang="zh-CN" smtClean="0"/>
-              <a:t>5/20/25</a:t>
+              <a:t>5/30/25</a:t>
             </a:fld>
             <a:endParaRPr kumimoji="1" lang="zh-CN" altLang="en-US"/>
           </a:p>
@@ -2602,13 +2602,13 @@
   <p:clrMapOvr>
     <a:masterClrMapping/>
   </p:clrMapOvr>
-  <mc:AlternateContent xmlns:mc="http://schemas.openxmlformats.org/markup-compatibility/2006">
-    <mc:Choice xmlns:p159="http://schemas.microsoft.com/office/powerpoint/2015/09/main" Requires="p159">
+  <mc:AlternateContent xmlns:mc="http://schemas.openxmlformats.org/markup-compatibility/2006" xmlns:p159="http://schemas.microsoft.com/office/powerpoint/2015/09/main">
+    <mc:Choice Requires="p159">
       <p:transition>
         <p159:morph option="byObject"/>
       </p:transition>
     </mc:Choice>
-    <mc:Fallback>
+    <mc:Fallback xmlns="">
       <p:transition>
         <p:fade/>
       </p:transition>
@@ -2820,7 +2820,7 @@
           <a:p>
             <a:fld id="{4CC9F970-C3BC-7746-BA67-8A67981FCD36}" type="datetime1">
               <a:rPr kumimoji="1" lang="en-US" altLang="zh-CN" smtClean="0"/>
-              <a:t>5/20/25</a:t>
+              <a:t>5/30/25</a:t>
             </a:fld>
             <a:endParaRPr kumimoji="1" lang="zh-CN" altLang="en-US"/>
           </a:p>
@@ -2890,13 +2890,13 @@
   <p:clrMapOvr>
     <a:masterClrMapping/>
   </p:clrMapOvr>
-  <mc:AlternateContent xmlns:mc="http://schemas.openxmlformats.org/markup-compatibility/2006">
-    <mc:Choice xmlns:p159="http://schemas.microsoft.com/office/powerpoint/2015/09/main" Requires="p159">
+  <mc:AlternateContent xmlns:mc="http://schemas.openxmlformats.org/markup-compatibility/2006" xmlns:p159="http://schemas.microsoft.com/office/powerpoint/2015/09/main">
+    <mc:Choice Requires="p159">
       <p:transition>
         <p159:morph option="byObject"/>
       </p:transition>
     </mc:Choice>
-    <mc:Fallback>
+    <mc:Fallback xmlns="">
       <p:transition>
         <p:fade/>
       </p:transition>
@@ -3100,7 +3100,7 @@
           <a:p>
             <a:fld id="{0839F231-618B-564F-B185-8DC011C1E3F9}" type="datetime1">
               <a:rPr kumimoji="1" lang="en-US" altLang="zh-CN" smtClean="0"/>
-              <a:t>5/20/25</a:t>
+              <a:t>5/30/25</a:t>
             </a:fld>
             <a:endParaRPr kumimoji="1" lang="zh-CN" altLang="en-US"/>
           </a:p>
@@ -3170,13 +3170,13 @@
   <p:clrMapOvr>
     <a:masterClrMapping/>
   </p:clrMapOvr>
-  <mc:AlternateContent xmlns:mc="http://schemas.openxmlformats.org/markup-compatibility/2006">
-    <mc:Choice xmlns:p159="http://schemas.microsoft.com/office/powerpoint/2015/09/main" Requires="p159">
+  <mc:AlternateContent xmlns:mc="http://schemas.openxmlformats.org/markup-compatibility/2006" xmlns:p159="http://schemas.microsoft.com/office/powerpoint/2015/09/main">
+    <mc:Choice Requires="p159">
       <p:transition>
         <p159:morph option="byObject"/>
       </p:transition>
     </mc:Choice>
-    <mc:Fallback>
+    <mc:Fallback xmlns="">
       <p:transition>
         <p:fade/>
       </p:transition>
@@ -3527,7 +3527,7 @@
           <a:p>
             <a:fld id="{B4D9A89C-3147-5144-BB44-EDF44E8E71E7}" type="datetime1">
               <a:rPr kumimoji="1" lang="en-US" altLang="zh-CN" smtClean="0"/>
-              <a:t>5/20/25</a:t>
+              <a:t>5/30/25</a:t>
             </a:fld>
             <a:endParaRPr kumimoji="1" lang="zh-CN" altLang="en-US"/>
           </a:p>
@@ -3597,13 +3597,13 @@
   <p:clrMapOvr>
     <a:masterClrMapping/>
   </p:clrMapOvr>
-  <mc:AlternateContent xmlns:mc="http://schemas.openxmlformats.org/markup-compatibility/2006">
-    <mc:Choice xmlns:p159="http://schemas.microsoft.com/office/powerpoint/2015/09/main" Requires="p159">
+  <mc:AlternateContent xmlns:mc="http://schemas.openxmlformats.org/markup-compatibility/2006" xmlns:p159="http://schemas.microsoft.com/office/powerpoint/2015/09/main">
+    <mc:Choice Requires="p159">
       <p:transition>
         <p159:morph option="byObject"/>
       </p:transition>
     </mc:Choice>
-    <mc:Fallback>
+    <mc:Fallback xmlns="">
       <p:transition>
         <p:fade/>
       </p:transition>
@@ -3681,7 +3681,7 @@
           <a:p>
             <a:fld id="{84785A04-64A5-9E48-B50D-348A0CDEF3DA}" type="datetime1">
               <a:rPr kumimoji="1" lang="en-US" altLang="zh-CN" smtClean="0"/>
-              <a:t>5/20/25</a:t>
+              <a:t>5/30/25</a:t>
             </a:fld>
             <a:endParaRPr kumimoji="1" lang="zh-CN" altLang="en-US"/>
           </a:p>
@@ -3751,13 +3751,13 @@
   <p:clrMapOvr>
     <a:masterClrMapping/>
   </p:clrMapOvr>
-  <mc:AlternateContent xmlns:mc="http://schemas.openxmlformats.org/markup-compatibility/2006">
-    <mc:Choice xmlns:p159="http://schemas.microsoft.com/office/powerpoint/2015/09/main" Requires="p159">
+  <mc:AlternateContent xmlns:mc="http://schemas.openxmlformats.org/markup-compatibility/2006" xmlns:p159="http://schemas.microsoft.com/office/powerpoint/2015/09/main">
+    <mc:Choice Requires="p159">
       <p:transition>
         <p159:morph option="byObject"/>
       </p:transition>
     </mc:Choice>
-    <mc:Fallback>
+    <mc:Fallback xmlns="">
       <p:transition>
         <p:fade/>
       </p:transition>
@@ -3806,7 +3806,7 @@
           <a:p>
             <a:fld id="{2E007129-4393-C846-91EE-E2188F62EDDB}" type="datetime1">
               <a:rPr kumimoji="1" lang="en-US" altLang="zh-CN" smtClean="0"/>
-              <a:t>5/20/25</a:t>
+              <a:t>5/30/25</a:t>
             </a:fld>
             <a:endParaRPr kumimoji="1" lang="zh-CN" altLang="en-US"/>
           </a:p>
@@ -3876,13 +3876,13 @@
   <p:clrMapOvr>
     <a:masterClrMapping/>
   </p:clrMapOvr>
-  <mc:AlternateContent xmlns:mc="http://schemas.openxmlformats.org/markup-compatibility/2006">
-    <mc:Choice xmlns:p159="http://schemas.microsoft.com/office/powerpoint/2015/09/main" Requires="p159">
+  <mc:AlternateContent xmlns:mc="http://schemas.openxmlformats.org/markup-compatibility/2006" xmlns:p159="http://schemas.microsoft.com/office/powerpoint/2015/09/main">
+    <mc:Choice Requires="p159">
       <p:transition>
         <p159:morph option="byObject"/>
       </p:transition>
     </mc:Choice>
-    <mc:Fallback>
+    <mc:Fallback xmlns="">
       <p:transition>
         <p:fade/>
       </p:transition>
@@ -4131,7 +4131,7 @@
           <a:p>
             <a:fld id="{886EAD98-102F-424B-9CD8-2F41F4D7D493}" type="datetime1">
               <a:rPr kumimoji="1" lang="en-US" altLang="zh-CN" smtClean="0"/>
-              <a:t>5/20/25</a:t>
+              <a:t>5/30/25</a:t>
             </a:fld>
             <a:endParaRPr kumimoji="1" lang="zh-CN" altLang="en-US"/>
           </a:p>
@@ -4201,13 +4201,13 @@
   <p:clrMapOvr>
     <a:masterClrMapping/>
   </p:clrMapOvr>
-  <mc:AlternateContent xmlns:mc="http://schemas.openxmlformats.org/markup-compatibility/2006">
-    <mc:Choice xmlns:p159="http://schemas.microsoft.com/office/powerpoint/2015/09/main" Requires="p159">
+  <mc:AlternateContent xmlns:mc="http://schemas.openxmlformats.org/markup-compatibility/2006" xmlns:p159="http://schemas.microsoft.com/office/powerpoint/2015/09/main">
+    <mc:Choice Requires="p159">
       <p:transition>
         <p159:morph option="byObject"/>
       </p:transition>
     </mc:Choice>
-    <mc:Fallback>
+    <mc:Fallback xmlns="">
       <p:transition>
         <p:fade/>
       </p:transition>
@@ -4432,7 +4432,7 @@
           <a:p>
             <a:fld id="{05ED4CC6-DA70-EB42-8B3C-403CD4FC96B8}" type="datetime1">
               <a:rPr kumimoji="1" lang="en-US" altLang="zh-CN" smtClean="0"/>
-              <a:t>5/20/25</a:t>
+              <a:t>5/30/25</a:t>
             </a:fld>
             <a:endParaRPr kumimoji="1" lang="zh-CN" altLang="en-US"/>
           </a:p>
@@ -4502,13 +4502,13 @@
   <p:clrMapOvr>
     <a:masterClrMapping/>
   </p:clrMapOvr>
-  <mc:AlternateContent xmlns:mc="http://schemas.openxmlformats.org/markup-compatibility/2006">
-    <mc:Choice xmlns:p159="http://schemas.microsoft.com/office/powerpoint/2015/09/main" Requires="p159">
+  <mc:AlternateContent xmlns:mc="http://schemas.openxmlformats.org/markup-compatibility/2006" xmlns:p159="http://schemas.microsoft.com/office/powerpoint/2015/09/main">
+    <mc:Choice Requires="p159">
       <p:transition>
         <p159:morph option="byObject"/>
       </p:transition>
     </mc:Choice>
-    <mc:Fallback>
+    <mc:Fallback xmlns="">
       <p:transition>
         <p:fade/>
       </p:transition>
@@ -4687,7 +4687,7 @@
           <a:p>
             <a:fld id="{17A68A2F-454D-6E4F-909A-ECEF1046A795}" type="datetime1">
               <a:rPr kumimoji="1" lang="en-US" altLang="zh-CN" smtClean="0"/>
-              <a:t>5/20/25</a:t>
+              <a:t>5/30/25</a:t>
             </a:fld>
             <a:endParaRPr kumimoji="1" lang="zh-CN" altLang="en-US"/>
           </a:p>
@@ -4804,13 +4804,13 @@
     <p:sldLayoutId id="2147483658" r:id="rId10"/>
     <p:sldLayoutId id="2147483659" r:id="rId11"/>
   </p:sldLayoutIdLst>
-  <mc:AlternateContent xmlns:mc="http://schemas.openxmlformats.org/markup-compatibility/2006">
-    <mc:Choice xmlns:p159="http://schemas.microsoft.com/office/powerpoint/2015/09/main" Requires="p159">
+  <mc:AlternateContent xmlns:mc="http://schemas.openxmlformats.org/markup-compatibility/2006" xmlns:p159="http://schemas.microsoft.com/office/powerpoint/2015/09/main">
+    <mc:Choice Requires="p159">
       <p:transition>
         <p159:morph option="byObject"/>
       </p:transition>
     </mc:Choice>
-    <mc:Fallback>
+    <mc:Fallback xmlns="">
       <p:transition>
         <p:fade/>
       </p:transition>
@@ -5256,13 +5256,13 @@
   <p:clrMapOvr>
     <a:masterClrMapping/>
   </p:clrMapOvr>
-  <mc:AlternateContent xmlns:mc="http://schemas.openxmlformats.org/markup-compatibility/2006">
-    <mc:Choice xmlns:p159="http://schemas.microsoft.com/office/powerpoint/2015/09/main" Requires="p159">
+  <mc:AlternateContent xmlns:mc="http://schemas.openxmlformats.org/markup-compatibility/2006" xmlns:p159="http://schemas.microsoft.com/office/powerpoint/2015/09/main">
+    <mc:Choice Requires="p159">
       <p:transition>
         <p159:morph option="byObject"/>
       </p:transition>
     </mc:Choice>
-    <mc:Fallback>
+    <mc:Fallback xmlns="">
       <p:transition>
         <p:fade/>
       </p:transition>
@@ -5830,19 +5830,7 @@
                 <a:cs typeface="Arial" panose="020B0604020202020204" pitchFamily="34" charset="0"/>
                 <a:hlinkClick r:id="rId3"/>
               </a:rPr>
-              <a:t>T</a:t>
-            </a:r>
-            <a:r>
-              <a:rPr lang="en-US" sz="1600" b="0" i="1" u="none" strike="noStrike" dirty="0">
-                <a:solidFill>
-                  <a:srgbClr val="212121"/>
-                </a:solidFill>
-                <a:effectLst/>
-                <a:latin typeface="Arial" panose="020B0604020202020204" pitchFamily="34" charset="0"/>
-                <a:cs typeface="Arial" panose="020B0604020202020204" pitchFamily="34" charset="0"/>
-                <a:hlinkClick r:id="rId3"/>
-              </a:rPr>
-              <a:t>he Dutch Hunger Winter</a:t>
+              <a:t>The Dutch Hunger Winter</a:t>
             </a:r>
             <a:r>
               <a:rPr lang="zh-CN" altLang="en-US" sz="1600" dirty="0">
@@ -5983,13 +5971,13 @@
   <p:clrMapOvr>
     <a:masterClrMapping/>
   </p:clrMapOvr>
-  <mc:AlternateContent xmlns:mc="http://schemas.openxmlformats.org/markup-compatibility/2006">
-    <mc:Choice xmlns:p159="http://schemas.microsoft.com/office/powerpoint/2015/09/main" Requires="p159">
+  <mc:AlternateContent xmlns:mc="http://schemas.openxmlformats.org/markup-compatibility/2006" xmlns:p159="http://schemas.microsoft.com/office/powerpoint/2015/09/main">
+    <mc:Choice Requires="p159">
       <p:transition>
         <p159:morph option="byObject"/>
       </p:transition>
     </mc:Choice>
-    <mc:Fallback>
+    <mc:Fallback xmlns="">
       <p:transition>
         <p:fade/>
       </p:transition>
@@ -6417,13 +6405,13 @@
   <p:clrMapOvr>
     <a:masterClrMapping/>
   </p:clrMapOvr>
-  <mc:AlternateContent xmlns:mc="http://schemas.openxmlformats.org/markup-compatibility/2006">
-    <mc:Choice xmlns:p159="http://schemas.microsoft.com/office/powerpoint/2015/09/main" Requires="p159">
+  <mc:AlternateContent xmlns:mc="http://schemas.openxmlformats.org/markup-compatibility/2006" xmlns:p159="http://schemas.microsoft.com/office/powerpoint/2015/09/main">
+    <mc:Choice Requires="p159">
       <p:transition>
         <p159:morph option="byObject"/>
       </p:transition>
     </mc:Choice>
-    <mc:Fallback>
+    <mc:Fallback xmlns="">
       <p:transition>
         <p:fade/>
       </p:transition>
@@ -7224,13 +7212,13 @@
   <p:clrMapOvr>
     <a:masterClrMapping/>
   </p:clrMapOvr>
-  <mc:AlternateContent xmlns:mc="http://schemas.openxmlformats.org/markup-compatibility/2006">
-    <mc:Choice xmlns:p159="http://schemas.microsoft.com/office/powerpoint/2015/09/main" Requires="p159">
+  <mc:AlternateContent xmlns:mc="http://schemas.openxmlformats.org/markup-compatibility/2006" xmlns:p159="http://schemas.microsoft.com/office/powerpoint/2015/09/main">
+    <mc:Choice Requires="p159">
       <p:transition>
         <p159:morph option="byObject"/>
       </p:transition>
     </mc:Choice>
-    <mc:Fallback>
+    <mc:Fallback xmlns="">
       <p:transition>
         <p:fade/>
       </p:transition>
@@ -8448,13 +8436,13 @@
   <p:clrMapOvr>
     <a:masterClrMapping/>
   </p:clrMapOvr>
-  <mc:AlternateContent xmlns:mc="http://schemas.openxmlformats.org/markup-compatibility/2006">
-    <mc:Choice xmlns:p159="http://schemas.microsoft.com/office/powerpoint/2015/09/main" Requires="p159">
+  <mc:AlternateContent xmlns:mc="http://schemas.openxmlformats.org/markup-compatibility/2006" xmlns:p159="http://schemas.microsoft.com/office/powerpoint/2015/09/main">
+    <mc:Choice Requires="p159">
       <p:transition>
         <p159:morph option="byObject"/>
       </p:transition>
     </mc:Choice>
-    <mc:Fallback>
+    <mc:Fallback xmlns="">
       <p:transition>
         <p:fade/>
       </p:transition>
@@ -10209,13 +10197,13 @@
   <p:clrMapOvr>
     <a:masterClrMapping/>
   </p:clrMapOvr>
-  <mc:AlternateContent xmlns:mc="http://schemas.openxmlformats.org/markup-compatibility/2006">
-    <mc:Choice xmlns:p159="http://schemas.microsoft.com/office/powerpoint/2015/09/main" Requires="p159">
+  <mc:AlternateContent xmlns:mc="http://schemas.openxmlformats.org/markup-compatibility/2006" xmlns:p159="http://schemas.microsoft.com/office/powerpoint/2015/09/main">
+    <mc:Choice Requires="p159">
       <p:transition>
         <p159:morph option="byObject"/>
       </p:transition>
     </mc:Choice>
-    <mc:Fallback>
+    <mc:Fallback xmlns="">
       <p:transition>
         <p:fade/>
       </p:transition>
@@ -11319,13 +11307,13 @@
   <p:clrMapOvr>
     <a:masterClrMapping/>
   </p:clrMapOvr>
-  <mc:AlternateContent xmlns:mc="http://schemas.openxmlformats.org/markup-compatibility/2006">
-    <mc:Choice xmlns:p159="http://schemas.microsoft.com/office/powerpoint/2015/09/main" Requires="p159">
+  <mc:AlternateContent xmlns:mc="http://schemas.openxmlformats.org/markup-compatibility/2006" xmlns:p159="http://schemas.microsoft.com/office/powerpoint/2015/09/main">
+    <mc:Choice Requires="p159">
       <p:transition>
         <p159:morph option="byObject"/>
       </p:transition>
     </mc:Choice>
-    <mc:Fallback>
+    <mc:Fallback xmlns="">
       <p:transition>
         <p:fade/>
       </p:transition>
@@ -12304,13 +12292,13 @@
   <p:clrMapOvr>
     <a:masterClrMapping/>
   </p:clrMapOvr>
-  <mc:AlternateContent xmlns:mc="http://schemas.openxmlformats.org/markup-compatibility/2006">
-    <mc:Choice xmlns:p159="http://schemas.microsoft.com/office/powerpoint/2015/09/main" Requires="p159">
+  <mc:AlternateContent xmlns:mc="http://schemas.openxmlformats.org/markup-compatibility/2006" xmlns:p159="http://schemas.microsoft.com/office/powerpoint/2015/09/main">
+    <mc:Choice Requires="p159">
       <p:transition>
         <p159:morph option="byObject"/>
       </p:transition>
     </mc:Choice>
-    <mc:Fallback>
+    <mc:Fallback xmlns="">
       <p:transition>
         <p:fade/>
       </p:transition>
@@ -13047,21 +13035,27 @@
               <a:t>（</a:t>
             </a:r>
             <a:r>
+              <a:rPr lang="en-US" altLang="zh-CN" dirty="0">
+                <a:solidFill>
+                  <a:srgbClr val="333333"/>
+                </a:solidFill>
+              </a:rPr>
+              <a:t>f</a:t>
+            </a:r>
+            <a:r>
               <a:rPr lang="en-US" b="0" i="0" u="none" strike="noStrike" dirty="0">
                 <a:solidFill>
                   <a:srgbClr val="333333"/>
                 </a:solidFill>
                 <a:effectLst/>
-                <a:latin typeface="Helvetica Neue" panose="02000503000000020004" pitchFamily="2" charset="0"/>
-              </a:rPr>
-              <a:t>Fecal microbiota transplantation</a:t>
+              </a:rPr>
+              <a:t>ecal microbiota transplantation</a:t>
             </a:r>
             <a:r>
               <a:rPr lang="en-US" dirty="0">
                 <a:solidFill>
                   <a:srgbClr val="333333"/>
                 </a:solidFill>
-                <a:latin typeface="Helvetica Neue" panose="02000503000000020004" pitchFamily="2" charset="0"/>
               </a:rPr>
               <a:t>, </a:t>
             </a:r>
@@ -13071,7 +13065,6 @@
                   <a:srgbClr val="333333"/>
                 </a:solidFill>
                 <a:effectLst/>
-                <a:latin typeface="Helvetica Neue" panose="02000503000000020004" pitchFamily="2" charset="0"/>
               </a:rPr>
               <a:t>FMT</a:t>
             </a:r>
@@ -13156,7 +13149,6 @@
                 <a:solidFill>
                   <a:prstClr val="black"/>
                 </a:solidFill>
-                <a:latin typeface="Calibri" panose="020F0502020204030204"/>
                 <a:ea typeface="等线" panose="02010600030101010101" pitchFamily="2" charset="-122"/>
               </a:rPr>
               <a:t>技术特点</a:t>
@@ -13171,9 +13163,7 @@
               <a:effectLst/>
               <a:uLnTx/>
               <a:uFillTx/>
-              <a:latin typeface="Calibri" panose="020F0502020204030204"/>
               <a:ea typeface="等线" panose="02010600030101010101" pitchFamily="2" charset="-122"/>
-              <a:cs typeface="+mn-cs"/>
             </a:endParaRPr>
           </a:p>
           <a:p>
@@ -13336,13 +13326,13 @@
   <p:clrMapOvr>
     <a:masterClrMapping/>
   </p:clrMapOvr>
-  <mc:AlternateContent xmlns:mc="http://schemas.openxmlformats.org/markup-compatibility/2006">
-    <mc:Choice xmlns:p159="http://schemas.microsoft.com/office/powerpoint/2015/09/main" Requires="p159">
+  <mc:AlternateContent xmlns:mc="http://schemas.openxmlformats.org/markup-compatibility/2006" xmlns:p159="http://schemas.microsoft.com/office/powerpoint/2015/09/main">
+    <mc:Choice Requires="p159">
       <p:transition>
         <p159:morph option="byObject"/>
       </p:transition>
     </mc:Choice>
-    <mc:Fallback>
+    <mc:Fallback xmlns="">
       <p:transition>
         <p:fade/>
       </p:transition>
@@ -13836,13 +13826,13 @@
   <p:clrMapOvr>
     <a:masterClrMapping/>
   </p:clrMapOvr>
-  <mc:AlternateContent xmlns:mc="http://schemas.openxmlformats.org/markup-compatibility/2006">
-    <mc:Choice xmlns:p159="http://schemas.microsoft.com/office/powerpoint/2015/09/main" Requires="p159">
+  <mc:AlternateContent xmlns:mc="http://schemas.openxmlformats.org/markup-compatibility/2006" xmlns:p159="http://schemas.microsoft.com/office/powerpoint/2015/09/main">
+    <mc:Choice Requires="p159">
       <p:transition>
         <p159:morph option="byObject"/>
       </p:transition>
     </mc:Choice>
-    <mc:Fallback>
+    <mc:Fallback xmlns="">
       <p:transition>
         <p:fade/>
       </p:transition>
